--- a/reports/colombia_eq_20260810/output/ADRC_EQ_COL_Choco_20260810_ES.pptx
+++ b/reports/colombia_eq_20260810/output/ADRC_EQ_COL_Choco_20260810_ES.pptx
@@ -3379,7 +3379,7 @@
                 <a:ea typeface="Calibri" pitchFamily="34" charset="-122"/>
                 <a:cs typeface="Calibri" pitchFamily="34" charset="-120"/>
               </a:rPr>
-              <a:t>Mww 7.4   ·   profundidad 107 km   ·   MMI VII (muy fuerte) — ShakeMap del USGS   ·   GLIDE EQ-2026-XXXXXX-COL (TBC)</a:t>
+              <a:t>Mww 7.4   ·   profundidad 107 km   ·   MMI VII (muy fuerte) — ShakeMap del USGS   ·   GLIDE EQ-2026-000146-COL</a:t>
             </a:r>
             <a:endParaRPr lang="en-US" sz="1150" dirty="0"/>
           </a:p>
@@ -25337,7 +25337,7 @@
                           <a:ea typeface="Calibri" pitchFamily="34" charset="-122"/>
                           <a:cs typeface="Calibri" pitchFamily="34" charset="-120"/>
                         </a:rPr>
-                        <a:t>GLIDEnumber (para el identificador del evento cuando se asigne)</a:t>
+                        <a:t>GLIDEnumber — EQ-2026-000146-COL (identificador del evento)</a:t>
                       </a:r>
                       <a:endParaRPr lang="en-US" sz="950" dirty="0">
                         <a:latin typeface="Calibri" charset="0"/>
@@ -26281,8 +26281,8 @@
         </p:nvSpPr>
         <p:spPr>
           <a:xfrm>
-            <a:off x="365760" y="969264"/>
-            <a:ext cx="11430000" cy="329184"/>
+            <a:off x="365760" y="950976"/>
+            <a:ext cx="11430000" cy="384048"/>
           </a:xfrm>
           <a:prstGeom prst="rect">
             <a:avLst/>
@@ -26306,7 +26306,7 @@
                 <a:ea typeface="Calibri" pitchFamily="34" charset="-122"/>
                 <a:cs typeface="Calibri" pitchFamily="34" charset="-120"/>
               </a:rPr>
-              <a:t>10 de agosto de 2026, 07:34 COT (UTC-5)  (10 de agosto de 2026, 12:34 UTC / 10 de agosto de 2026, 21:34 JST)    |    Mww 7.4    |    profundidad 107 km    |    MMI VII (muy fuerte) — ShakeMap del USGS</a:t>
+              <a:t>10 ago. 2026, 07:34 COT (12:34 UTC / 21:34 JST)    |    Mww 7.4    |    profundidad 107 km    |    MMI VII (muy fuerte) — ShakeMap del USGS</a:t>
             </a:r>
             <a:endParaRPr lang="en-US" sz="1150" dirty="0"/>
           </a:p>
@@ -26320,7 +26320,7 @@
         </p:nvSpPr>
         <p:spPr>
           <a:xfrm>
-            <a:off x="365760" y="1280160"/>
+            <a:off x="365760" y="1335024"/>
             <a:ext cx="11430000" cy="274320"/>
           </a:xfrm>
           <a:prstGeom prst="rect">
@@ -26359,8 +26359,8 @@
         </p:nvSpPr>
         <p:spPr>
           <a:xfrm>
-            <a:off x="365760" y="1627632"/>
-            <a:ext cx="11430000" cy="4480560"/>
+            <a:off x="365760" y="1664208"/>
+            <a:ext cx="11430000" cy="4443984"/>
           </a:xfrm>
           <a:prstGeom prst="rect">
             <a:avLst/>
@@ -26624,13 +26624,13 @@
             <a:r>
               <a:rPr lang="en-US" sz="1250" b="1" dirty="0">
                 <a:solidFill>
-                  <a:srgbClr val="888888"/>
+                  <a:srgbClr val="1E7A34"/>
                 </a:solidFill>
                 <a:latin typeface="Calibri" pitchFamily="34" charset="0"/>
                 <a:ea typeface="Calibri" pitchFamily="34" charset="-122"/>
                 <a:cs typeface="Calibri" pitchFamily="34" charset="-120"/>
               </a:rPr>
-              <a:t>[Por confirmar] </a:t>
+              <a:t>[Oficial] </a:t>
             </a:r>
             <a:pPr algn="l" indent="0" marL="0">
               <a:spcAft>
@@ -26647,7 +26647,7 @@
                 <a:ea typeface="Calibri" pitchFamily="34" charset="-122"/>
                 <a:cs typeface="Calibri" pitchFamily="34" charset="-120"/>
               </a:rPr>
-              <a:t>Al momento de redactar este informe no se había confirmado un número GLIDE para este evento; se incorporará cuando se asigne.</a:t>
+              <a:t>Número GLIDE asignado a este evento: EQ-2026-000146-COL.</a:t>
             </a:r>
             <a:endParaRPr lang="en-US" sz="1250" dirty="0"/>
           </a:p>
@@ -35954,7 +35954,7 @@
                           <a:ea typeface="Calibri" pitchFamily="34" charset="-122"/>
                           <a:cs typeface="Calibri" pitchFamily="34" charset="-120"/>
                         </a:rPr>
-                        <a:t>EQ-2026-XXXXXX-COL (TBC)</a:t>
+                        <a:t>EQ-2026-000146-COL</a:t>
                       </a:r>
                       <a:endParaRPr lang="en-US" sz="950" dirty="0">
                         <a:latin typeface="Calibri" charset="0"/>

--- a/reports/colombia_eq_20260810/output/ADRC_EQ_COL_Choco_20260810_ES.pptx
+++ b/reports/colombia_eq_20260810/output/ADRC_EQ_COL_Choco_20260810_ES.pptx
@@ -27,9 +27,10 @@
     <p:sldId id="275" r:id="rId21"/>
     <p:sldId id="276" r:id="rId22"/>
     <p:sldId id="277" r:id="rId23"/>
+    <p:sldId id="278" r:id="rId24"/>
   </p:sldIdLst>
   <p:notesMasterIdLst>
-    <p:notesMasterId r:id="rId24"/>
+    <p:notesMasterId r:id="rId25"/>
   </p:notesMasterIdLst>
   <p:sldSz cx="12192000" cy="6858000"/>
   <p:notesSz cx="6858000" cy="12192000"/>
@@ -2347,6 +2348,94 @@
 </p:notes>
 </file>
 
+<file path=ppt/notesSlides/notesSlide23.xml><?xml version="1.0" encoding="utf-8"?>
+<p:notes xmlns:a="http://schemas.openxmlformats.org/drawingml/2006/main" xmlns:r="http://schemas.openxmlformats.org/officeDocument/2006/relationships" xmlns:p="http://schemas.openxmlformats.org/presentationml/2006/main">
+  <p:cSld>
+    <p:spTree>
+      <p:nvGrpSpPr>
+        <p:cNvPr id="1" name=""/>
+        <p:cNvGrpSpPr/>
+        <p:nvPr/>
+      </p:nvGrpSpPr>
+      <p:grpSpPr>
+        <a:xfrm>
+          <a:off x="0" y="0"/>
+          <a:ext cx="0" cy="0"/>
+          <a:chOff x="0" y="0"/>
+          <a:chExt cx="0" cy="0"/>
+        </a:xfrm>
+      </p:grpSpPr>
+      <p:sp>
+        <p:nvSpPr>
+          <p:cNvPr id="2" name="Slide Image Placeholder 1"/>
+          <p:cNvSpPr>
+            <a:spLocks noGrp="1" noRot="1" noChangeAspect="1"/>
+          </p:cNvSpPr>
+          <p:nvPr>
+            <p:ph type="sldImg"/>
+          </p:nvPr>
+        </p:nvSpPr>
+        <p:spPr/>
+      </p:sp>
+      <p:sp>
+        <p:nvSpPr>
+          <p:cNvPr id="3" name="Notes Placeholder 2"/>
+          <p:cNvSpPr>
+            <a:spLocks noGrp="1"/>
+          </p:cNvSpPr>
+          <p:nvPr>
+            <p:ph type="body" idx="1"/>
+          </p:nvPr>
+        </p:nvSpPr>
+        <p:spPr/>
+        <p:txBody>
+          <a:bodyPr/>
+          <a:lstStyle/>
+          <a:p>
+            <a:r>
+              <a:rPr lang="en-US" dirty="0"/>
+              <a:t/>
+            </a:r>
+            <a:endParaRPr lang="en-US" dirty="0"/>
+          </a:p>
+        </p:txBody>
+      </p:sp>
+      <p:sp>
+        <p:nvSpPr>
+          <p:cNvPr id="4" name="Slide Number Placeholder 3"/>
+          <p:cNvSpPr>
+            <a:spLocks noGrp="1"/>
+          </p:cNvSpPr>
+          <p:nvPr>
+            <p:ph type="sldNum" sz="quarter" idx="10"/>
+          </p:nvPr>
+        </p:nvSpPr>
+        <p:spPr/>
+        <p:txBody>
+          <a:bodyPr/>
+          <a:lstStyle/>
+          <a:p>
+            <a:fld id="{F7021451-1387-4CA6-816F-3879F97B5CBC}" type="slidenum">
+              <a:rPr lang="en-US"/>
+              <a:t>23</a:t>
+            </a:fld>
+            <a:endParaRPr lang="en-US"/>
+          </a:p>
+        </p:txBody>
+      </p:sp>
+    </p:spTree>
+    <p:extLst>
+      <p:ext uri="{BB962C8B-B14F-4D97-AF65-F5344CB8AC3E}">
+        <p14:creationId xmlns:p14="http://schemas.microsoft.com/office/powerpoint/2010/main" val="1024086991"/>
+      </p:ext>
+    </p:extLst>
+  </p:cSld>
+  <p:clrMapOvr>
+    <a:masterClrMapping/>
+  </p:clrMapOvr>
+</p:notes>
+</file>
+
 <file path=ppt/notesSlides/notesSlide3.xml><?xml version="1.0" encoding="utf-8"?>
 <p:notes xmlns:a="http://schemas.openxmlformats.org/drawingml/2006/main" xmlns:r="http://schemas.openxmlformats.org/officeDocument/2006/relationships" xmlns:p="http://schemas.openxmlformats.org/presentationml/2006/main">
   <p:cSld>
@@ -12442,13 +12531,13 @@
             <a:r>
               <a:rPr lang="en-US" sz="1200" b="1" dirty="0">
                 <a:solidFill>
-                  <a:srgbClr val="888888"/>
+                  <a:srgbClr val="B8860B"/>
                 </a:solidFill>
                 <a:latin typeface="Calibri" pitchFamily="34" charset="0"/>
                 <a:ea typeface="Calibri" pitchFamily="34" charset="-122"/>
                 <a:cs typeface="Calibri" pitchFamily="34" charset="-120"/>
               </a:rPr>
-              <a:t>[Por confirmar] </a:t>
+              <a:t>[Prensa] </a:t>
             </a:r>
             <a:pPr algn="l" indent="0" marL="0">
               <a:spcAft>
@@ -12465,7 +12554,7 @@
                 <a:ea typeface="Calibri" pitchFamily="34" charset="-122"/>
                 <a:cs typeface="Calibri" pitchFamily="34" charset="-120"/>
               </a:rPr>
-              <a:t>Se reporta la activación de la Carta Internacional «Espacio y Grandes Catástrofes» para este sismo y la movilización del Servicio de Gestión de Emergencias Copernicus, para proveer imágenes satelitales de evaluación de daños. Los números de activación y los productos derivados están en verificación.</a:t>
+              <a:t>La Comisión Europea anunció la activación de Copernicus por el terremoto (declaración de la presidenta von der Leyen expresando el apoyo de la UE a Colombia). También se reporta la activación de la Carta Internacional «Espacio y Grandes Catástrofes». Al momento de redactar no se ha identificado ni el número de activación EMSR de Copernicus ni el de la Carta; nótese que EMSR915 corresponde a una activación por incendio forestal en Albania, no a este evento.</a:t>
             </a:r>
             <a:endParaRPr lang="en-US" sz="1200" dirty="0"/>
           </a:p>
@@ -13408,7 +13497,7 @@
                           <a:ea typeface="Calibri" pitchFamily="34" charset="-122"/>
                           <a:cs typeface="Calibri" pitchFamily="34" charset="-120"/>
                         </a:rPr>
-                        <a:t>Reportado / en verificación</a:t>
+                        <a:t>Reportada / número pendiente</a:t>
                       </a:r>
                       <a:endParaRPr lang="en-US" sz="900" dirty="0">
                         <a:latin typeface="Calibri" charset="0"/>
@@ -13614,7 +13703,7 @@
                           <a:ea typeface="Calibri" pitchFamily="34" charset="-122"/>
                           <a:cs typeface="Calibri" pitchFamily="34" charset="-120"/>
                         </a:rPr>
-                        <a:t>Cartografía rápida movilizada para los departamentos afectados</a:t>
+                        <a:t>Activación de cartografía rápida anunciada por la Comisión Europea; número de activación EMSR aún no identificado</a:t>
                       </a:r>
                       <a:endParaRPr lang="en-US" sz="950" dirty="0">
                         <a:latin typeface="Calibri" charset="0"/>
@@ -13682,7 +13771,7 @@
                           <a:ea typeface="Calibri" pitchFamily="34" charset="-122"/>
                           <a:cs typeface="Calibri" pitchFamily="34" charset="-120"/>
                         </a:rPr>
-                        <a:t>Reportado / en verificación</a:t>
+                        <a:t>Anunciada / número pendiente</a:t>
                       </a:r>
                       <a:endParaRPr lang="en-US" sz="900" dirty="0">
                         <a:latin typeface="Calibri" charset="0"/>
@@ -13744,13 +13833,13 @@
                       <a:r>
                         <a:rPr lang="en-US" sz="850" b="1" dirty="0">
                           <a:solidFill>
-                            <a:srgbClr val="888888"/>
+                            <a:srgbClr val="B8860B"/>
                           </a:solidFill>
                           <a:latin typeface="Calibri" pitchFamily="34" charset="0"/>
                           <a:ea typeface="Calibri" pitchFamily="34" charset="-122"/>
                           <a:cs typeface="Calibri" pitchFamily="34" charset="-120"/>
                         </a:rPr>
-                        <a:t>Por confirmar</a:t>
+                        <a:t>Prensa</a:t>
                       </a:r>
                       <a:endParaRPr lang="en-US" sz="850" dirty="0">
                         <a:latin typeface="Calibri" charset="0"/>
@@ -21150,7 +21239,7 @@
                 <a:ea typeface="Cambria" pitchFamily="34" charset="-122"/>
                 <a:cs typeface="Cambria" pitchFamily="34" charset="-120"/>
               </a:rPr>
-              <a:t>Enlaces útiles y fuentes (1/2)</a:t>
+              <a:t>Enlaces útiles y fuentes (1/3)</a:t>
             </a:r>
             <a:endParaRPr lang="en-US" sz="2100" dirty="0"/>
           </a:p>
@@ -24835,7 +24924,7 @@
                 <a:ea typeface="Cambria" pitchFamily="34" charset="-122"/>
                 <a:cs typeface="Cambria" pitchFamily="34" charset="-120"/>
               </a:rPr>
-              <a:t>Enlaces útiles y fuentes (2/2)</a:t>
+              <a:t>Enlaces útiles y fuentes (2/3)</a:t>
             </a:r>
             <a:endParaRPr lang="en-US" sz="2100" dirty="0"/>
           </a:p>
@@ -28411,6 +28500,656 @@
 <file path=ppt/slides/slide22.xml><?xml version="1.0" encoding="utf-8"?>
 <p:sld xmlns:a="http://schemas.openxmlformats.org/drawingml/2006/main" xmlns:r="http://schemas.openxmlformats.org/officeDocument/2006/relationships" xmlns:p="http://schemas.openxmlformats.org/presentationml/2006/main">
   <p:cSld name="Slide 22">
+    <p:bg>
+      <p:bgPr>
+        <a:solidFill>
+          <a:srgbClr val="FFFFFF"/>
+        </a:solidFill>
+      </p:bgPr>
+    </p:bg>
+    <p:spTree>
+      <p:nvGrpSpPr>
+        <p:cNvPr id="1" name=""/>
+        <p:cNvGrpSpPr/>
+        <p:nvPr/>
+      </p:nvGrpSpPr>
+      <p:grpSpPr>
+        <a:xfrm>
+          <a:off x="0" y="0"/>
+          <a:ext cx="0" cy="0"/>
+          <a:chOff x="0" y="0"/>
+          <a:chExt cx="0" cy="0"/>
+        </a:xfrm>
+      </p:grpSpPr>
+      <p:sp>
+        <p:nvSpPr>
+          <p:cNvPr id="2" name="Text 0"/>
+          <p:cNvSpPr/>
+          <p:nvPr/>
+        </p:nvSpPr>
+        <p:spPr>
+          <a:xfrm>
+            <a:off x="365760" y="292608"/>
+            <a:ext cx="10332720" cy="566928"/>
+          </a:xfrm>
+          <a:prstGeom prst="rect">
+            <a:avLst/>
+          </a:prstGeom>
+          <a:noFill/>
+          <a:ln/>
+        </p:spPr>
+        <p:txBody>
+          <a:bodyPr wrap="none" lIns="0" tIns="0" rIns="0" bIns="0" rtlCol="0" anchor="ctr">
+            <a:normAutofit/>
+          </a:bodyPr>
+          <a:lstStyle/>
+          <a:p>
+            <a:pPr algn="l" indent="0" marL="0">
+              <a:buNone/>
+            </a:pPr>
+            <a:r>
+              <a:rPr lang="en-US" sz="2100" b="1" dirty="0">
+                <a:solidFill>
+                  <a:srgbClr val="1F3864"/>
+                </a:solidFill>
+                <a:latin typeface="Cambria" pitchFamily="34" charset="0"/>
+                <a:ea typeface="Cambria" pitchFamily="34" charset="-122"/>
+                <a:cs typeface="Cambria" pitchFamily="34" charset="-120"/>
+              </a:rPr>
+              <a:t>Enlaces útiles y fuentes (3/3)</a:t>
+            </a:r>
+            <a:endParaRPr lang="en-US" sz="2100" dirty="0"/>
+          </a:p>
+        </p:txBody>
+      </p:sp>
+      <p:pic>
+        <p:nvPicPr>
+          <p:cNvPr id="3" name="Image 0" descr="/home/user/whatsmap/reports/colombia_eq_20260810/images/adrc_logo.png">    </p:cNvPr>
+          <p:cNvPicPr>
+            <a:picLocks noChangeAspect="1"/>
+          </p:cNvPicPr>
+          <p:nvPr/>
+        </p:nvPicPr>
+        <p:blipFill>
+          <a:blip r:embed="rId1"/>
+          <a:stretch>
+            <a:fillRect/>
+          </a:stretch>
+        </p:blipFill>
+        <p:spPr>
+          <a:xfrm>
+            <a:off x="10945368" y="73152"/>
+            <a:ext cx="877824" cy="877824"/>
+          </a:xfrm>
+          <a:prstGeom prst="rect">
+            <a:avLst/>
+          </a:prstGeom>
+        </p:spPr>
+      </p:pic>
+      <p:graphicFrame>
+        <p:nvGraphicFramePr>
+          <p:cNvPr id="23" name="Table 0"/>
+          <p:cNvGraphicFramePr>
+            <a:graphicFrameLocks noGrp="1"/>
+          </p:cNvGraphicFramePr>
+          <p:nvPr>
+            <p:extLst>
+              <p:ext uri="{D42A27DB-BD31-4B8C-83A1-F6EECF244321}">
+                <p14:modId xmlns:p14="http://schemas.microsoft.com/office/powerpoint/2010/main" val="1579011935"/>
+              </p:ext>
+            </p:extLst>
+          </p:nvPr>
+        </p:nvGraphicFramePr>
+        <p:xfrm>
+          <a:off x="365760" y="1024128"/>
+          <a:ext cx="11430000" cy="914400"/>
+        </p:xfrm>
+        <a:graphic>
+          <a:graphicData uri="http://schemas.openxmlformats.org/drawingml/2006/table">
+            <a:tbl>
+              <a:tblPr/>
+              <a:tblGrid>
+                <a:gridCol w="4206240"/>
+                <a:gridCol w="822960"/>
+                <a:gridCol w="6400800"/>
+              </a:tblGrid>
+              <a:tr h="292608">
+                <a:tc>
+                  <a:txBody>
+                    <a:bodyPr/>
+                    <a:lstStyle/>
+                    <a:p>
+                      <a:pPr algn="l" indent="0" marL="0">
+                        <a:buNone/>
+                      </a:pPr>
+                      <a:r>
+                        <a:rPr lang="en-US" sz="1150" b="1" dirty="0">
+                          <a:solidFill>
+                            <a:srgbClr val="FFFFFF"/>
+                          </a:solidFill>
+                          <a:latin typeface="Calibri" pitchFamily="34" charset="0"/>
+                          <a:ea typeface="Calibri" pitchFamily="34" charset="-122"/>
+                          <a:cs typeface="Calibri" pitchFamily="34" charset="-120"/>
+                        </a:rPr>
+                        <a:t>Fuente</a:t>
+                      </a:r>
+                      <a:endParaRPr lang="en-US" sz="1150" dirty="0">
+                        <a:latin typeface="Calibri" charset="0"/>
+                        <a:ea typeface="Calibri" charset="0"/>
+                        <a:cs typeface="Calibri" charset="0"/>
+                      </a:endParaRPr>
+                    </a:p>
+                  </a:txBody>
+                  <a:tcPr marL="50800" marR="50800" marT="50800" marB="50800" anchor="ctr">
+                    <a:lnL w="6350" cap="flat" cmpd="sng" algn="ctr">
+                      <a:solidFill>
+                        <a:srgbClr val="D9D9D9"/>
+                      </a:solidFill>
+                      <a:prstDash val="solid"/>
+                      <a:round/>
+                      <a:headEnd type="none" w="med" len="med"/>
+                      <a:tailEnd type="none" w="med" len="med"/>
+                    </a:lnL>
+                    <a:lnR w="6350" cap="flat" cmpd="sng" algn="ctr">
+                      <a:solidFill>
+                        <a:srgbClr val="D9D9D9"/>
+                      </a:solidFill>
+                      <a:prstDash val="solid"/>
+                      <a:round/>
+                      <a:headEnd type="none" w="med" len="med"/>
+                      <a:tailEnd type="none" w="med" len="med"/>
+                    </a:lnR>
+                    <a:lnT w="6350" cap="flat" cmpd="sng" algn="ctr">
+                      <a:solidFill>
+                        <a:srgbClr val="D9D9D9"/>
+                      </a:solidFill>
+                      <a:prstDash val="solid"/>
+                      <a:round/>
+                      <a:headEnd type="none" w="med" len="med"/>
+                      <a:tailEnd type="none" w="med" len="med"/>
+                    </a:lnT>
+                    <a:lnB w="6350" cap="flat" cmpd="sng" algn="ctr">
+                      <a:solidFill>
+                        <a:srgbClr val="D9D9D9"/>
+                      </a:solidFill>
+                      <a:prstDash val="solid"/>
+                      <a:round/>
+                      <a:headEnd type="none" w="med" len="med"/>
+                      <a:tailEnd type="none" w="med" len="med"/>
+                    </a:lnB>
+                    <a:solidFill>
+                      <a:srgbClr val="1F3864"/>
+                    </a:solidFill>
+                  </a:tcPr>
+                </a:tc>
+                <a:tc>
+                  <a:txBody>
+                    <a:bodyPr/>
+                    <a:lstStyle/>
+                    <a:p>
+                      <a:pPr algn="l" indent="0" marL="0">
+                        <a:buNone/>
+                      </a:pPr>
+                      <a:r>
+                        <a:rPr lang="en-US" sz="1150" b="1" dirty="0">
+                          <a:solidFill>
+                            <a:srgbClr val="FFFFFF"/>
+                          </a:solidFill>
+                          <a:latin typeface="Calibri" pitchFamily="34" charset="0"/>
+                          <a:ea typeface="Calibri" pitchFamily="34" charset="-122"/>
+                          <a:cs typeface="Calibri" pitchFamily="34" charset="-120"/>
+                        </a:rPr>
+                        <a:t>Categoría</a:t>
+                      </a:r>
+                      <a:endParaRPr lang="en-US" sz="1150" dirty="0">
+                        <a:latin typeface="Calibri" charset="0"/>
+                        <a:ea typeface="Calibri" charset="0"/>
+                        <a:cs typeface="Calibri" charset="0"/>
+                      </a:endParaRPr>
+                    </a:p>
+                  </a:txBody>
+                  <a:tcPr marL="50800" marR="50800" marT="50800" marB="50800" anchor="ctr">
+                    <a:lnL w="6350" cap="flat" cmpd="sng" algn="ctr">
+                      <a:solidFill>
+                        <a:srgbClr val="D9D9D9"/>
+                      </a:solidFill>
+                      <a:prstDash val="solid"/>
+                      <a:round/>
+                      <a:headEnd type="none" w="med" len="med"/>
+                      <a:tailEnd type="none" w="med" len="med"/>
+                    </a:lnL>
+                    <a:lnR w="6350" cap="flat" cmpd="sng" algn="ctr">
+                      <a:solidFill>
+                        <a:srgbClr val="D9D9D9"/>
+                      </a:solidFill>
+                      <a:prstDash val="solid"/>
+                      <a:round/>
+                      <a:headEnd type="none" w="med" len="med"/>
+                      <a:tailEnd type="none" w="med" len="med"/>
+                    </a:lnR>
+                    <a:lnT w="6350" cap="flat" cmpd="sng" algn="ctr">
+                      <a:solidFill>
+                        <a:srgbClr val="D9D9D9"/>
+                      </a:solidFill>
+                      <a:prstDash val="solid"/>
+                      <a:round/>
+                      <a:headEnd type="none" w="med" len="med"/>
+                      <a:tailEnd type="none" w="med" len="med"/>
+                    </a:lnT>
+                    <a:lnB w="6350" cap="flat" cmpd="sng" algn="ctr">
+                      <a:solidFill>
+                        <a:srgbClr val="D9D9D9"/>
+                      </a:solidFill>
+                      <a:prstDash val="solid"/>
+                      <a:round/>
+                      <a:headEnd type="none" w="med" len="med"/>
+                      <a:tailEnd type="none" w="med" len="med"/>
+                    </a:lnB>
+                    <a:solidFill>
+                      <a:srgbClr val="1F3864"/>
+                    </a:solidFill>
+                  </a:tcPr>
+                </a:tc>
+                <a:tc>
+                  <a:txBody>
+                    <a:bodyPr/>
+                    <a:lstStyle/>
+                    <a:p>
+                      <a:pPr algn="l" indent="0" marL="0">
+                        <a:buNone/>
+                      </a:pPr>
+                      <a:r>
+                        <a:rPr lang="en-US" sz="1150" b="1" dirty="0">
+                          <a:solidFill>
+                            <a:srgbClr val="FFFFFF"/>
+                          </a:solidFill>
+                          <a:latin typeface="Calibri" pitchFamily="34" charset="0"/>
+                          <a:ea typeface="Calibri" pitchFamily="34" charset="-122"/>
+                          <a:cs typeface="Calibri" pitchFamily="34" charset="-120"/>
+                        </a:rPr>
+                        <a:t>URL</a:t>
+                      </a:r>
+                      <a:endParaRPr lang="en-US" sz="1150" dirty="0">
+                        <a:latin typeface="Calibri" charset="0"/>
+                        <a:ea typeface="Calibri" charset="0"/>
+                        <a:cs typeface="Calibri" charset="0"/>
+                      </a:endParaRPr>
+                    </a:p>
+                  </a:txBody>
+                  <a:tcPr marL="50800" marR="50800" marT="50800" marB="50800" anchor="ctr">
+                    <a:lnL w="6350" cap="flat" cmpd="sng" algn="ctr">
+                      <a:solidFill>
+                        <a:srgbClr val="D9D9D9"/>
+                      </a:solidFill>
+                      <a:prstDash val="solid"/>
+                      <a:round/>
+                      <a:headEnd type="none" w="med" len="med"/>
+                      <a:tailEnd type="none" w="med" len="med"/>
+                    </a:lnL>
+                    <a:lnR w="6350" cap="flat" cmpd="sng" algn="ctr">
+                      <a:solidFill>
+                        <a:srgbClr val="D9D9D9"/>
+                      </a:solidFill>
+                      <a:prstDash val="solid"/>
+                      <a:round/>
+                      <a:headEnd type="none" w="med" len="med"/>
+                      <a:tailEnd type="none" w="med" len="med"/>
+                    </a:lnR>
+                    <a:lnT w="6350" cap="flat" cmpd="sng" algn="ctr">
+                      <a:solidFill>
+                        <a:srgbClr val="D9D9D9"/>
+                      </a:solidFill>
+                      <a:prstDash val="solid"/>
+                      <a:round/>
+                      <a:headEnd type="none" w="med" len="med"/>
+                      <a:tailEnd type="none" w="med" len="med"/>
+                    </a:lnT>
+                    <a:lnB w="6350" cap="flat" cmpd="sng" algn="ctr">
+                      <a:solidFill>
+                        <a:srgbClr val="D9D9D9"/>
+                      </a:solidFill>
+                      <a:prstDash val="solid"/>
+                      <a:round/>
+                      <a:headEnd type="none" w="med" len="med"/>
+                      <a:tailEnd type="none" w="med" len="med"/>
+                    </a:lnB>
+                    <a:solidFill>
+                      <a:srgbClr val="1F3864"/>
+                    </a:solidFill>
+                  </a:tcPr>
+                </a:tc>
+              </a:tr>
+              <a:tr h="292608">
+                <a:tc>
+                  <a:txBody>
+                    <a:bodyPr/>
+                    <a:lstStyle/>
+                    <a:p>
+                      <a:pPr algn="l" indent="0" marL="0">
+                        <a:buNone/>
+                      </a:pPr>
+                      <a:r>
+                        <a:rPr lang="en-US" sz="950" dirty="0">
+                          <a:solidFill>
+                            <a:srgbClr val="222222"/>
+                          </a:solidFill>
+                          <a:latin typeface="Calibri" pitchFamily="34" charset="0"/>
+                          <a:ea typeface="Calibri" pitchFamily="34" charset="-122"/>
+                          <a:cs typeface="Calibri" pitchFamily="34" charset="-120"/>
+                        </a:rPr>
+                        <a:t>Comisión Europea — apoyo de la UE a Colombia, Copernicus activado</a:t>
+                      </a:r>
+                      <a:endParaRPr lang="en-US" sz="950" dirty="0">
+                        <a:latin typeface="Calibri" charset="0"/>
+                        <a:ea typeface="Calibri" charset="0"/>
+                        <a:cs typeface="Calibri" charset="0"/>
+                      </a:endParaRPr>
+                    </a:p>
+                  </a:txBody>
+                  <a:tcPr marL="50800" marR="50800" marT="50800" marB="50800" anchor="ctr">
+                    <a:lnL w="6350" cap="flat" cmpd="sng" algn="ctr">
+                      <a:solidFill>
+                        <a:srgbClr val="D9D9D9"/>
+                      </a:solidFill>
+                      <a:prstDash val="solid"/>
+                      <a:round/>
+                      <a:headEnd type="none" w="med" len="med"/>
+                      <a:tailEnd type="none" w="med" len="med"/>
+                    </a:lnL>
+                    <a:lnR w="6350" cap="flat" cmpd="sng" algn="ctr">
+                      <a:solidFill>
+                        <a:srgbClr val="D9D9D9"/>
+                      </a:solidFill>
+                      <a:prstDash val="solid"/>
+                      <a:round/>
+                      <a:headEnd type="none" w="med" len="med"/>
+                      <a:tailEnd type="none" w="med" len="med"/>
+                    </a:lnR>
+                    <a:lnT w="6350" cap="flat" cmpd="sng" algn="ctr">
+                      <a:solidFill>
+                        <a:srgbClr val="D9D9D9"/>
+                      </a:solidFill>
+                      <a:prstDash val="solid"/>
+                      <a:round/>
+                      <a:headEnd type="none" w="med" len="med"/>
+                      <a:tailEnd type="none" w="med" len="med"/>
+                    </a:lnT>
+                    <a:lnB w="6350" cap="flat" cmpd="sng" algn="ctr">
+                      <a:solidFill>
+                        <a:srgbClr val="D9D9D9"/>
+                      </a:solidFill>
+                      <a:prstDash val="solid"/>
+                      <a:round/>
+                      <a:headEnd type="none" w="med" len="med"/>
+                      <a:tailEnd type="none" w="med" len="med"/>
+                    </a:lnB>
+                    <a:solidFill>
+                      <a:srgbClr val="EAF2F8"/>
+                    </a:solidFill>
+                  </a:tcPr>
+                </a:tc>
+                <a:tc>
+                  <a:txBody>
+                    <a:bodyPr/>
+                    <a:lstStyle/>
+                    <a:p>
+                      <a:pPr algn="ctr" indent="0" marL="0">
+                        <a:buNone/>
+                      </a:pPr>
+                      <a:r>
+                        <a:rPr lang="en-US" sz="850" b="1" dirty="0">
+                          <a:solidFill>
+                            <a:srgbClr val="B8860B"/>
+                          </a:solidFill>
+                          <a:latin typeface="Calibri" pitchFamily="34" charset="0"/>
+                          <a:ea typeface="Calibri" pitchFamily="34" charset="-122"/>
+                          <a:cs typeface="Calibri" pitchFamily="34" charset="-120"/>
+                        </a:rPr>
+                        <a:t>Prensa</a:t>
+                      </a:r>
+                      <a:endParaRPr lang="en-US" sz="850" dirty="0">
+                        <a:latin typeface="Calibri" charset="0"/>
+                        <a:ea typeface="Calibri" charset="0"/>
+                        <a:cs typeface="Calibri" charset="0"/>
+                      </a:endParaRPr>
+                    </a:p>
+                  </a:txBody>
+                  <a:tcPr marL="50800" marR="50800" marT="50800" marB="50800" anchor="ctr">
+                    <a:lnL w="6350" cap="flat" cmpd="sng" algn="ctr">
+                      <a:solidFill>
+                        <a:srgbClr val="D9D9D9"/>
+                      </a:solidFill>
+                      <a:prstDash val="solid"/>
+                      <a:round/>
+                      <a:headEnd type="none" w="med" len="med"/>
+                      <a:tailEnd type="none" w="med" len="med"/>
+                    </a:lnL>
+                    <a:lnR w="6350" cap="flat" cmpd="sng" algn="ctr">
+                      <a:solidFill>
+                        <a:srgbClr val="D9D9D9"/>
+                      </a:solidFill>
+                      <a:prstDash val="solid"/>
+                      <a:round/>
+                      <a:headEnd type="none" w="med" len="med"/>
+                      <a:tailEnd type="none" w="med" len="med"/>
+                    </a:lnR>
+                    <a:lnT w="6350" cap="flat" cmpd="sng" algn="ctr">
+                      <a:solidFill>
+                        <a:srgbClr val="D9D9D9"/>
+                      </a:solidFill>
+                      <a:prstDash val="solid"/>
+                      <a:round/>
+                      <a:headEnd type="none" w="med" len="med"/>
+                      <a:tailEnd type="none" w="med" len="med"/>
+                    </a:lnT>
+                    <a:lnB w="6350" cap="flat" cmpd="sng" algn="ctr">
+                      <a:solidFill>
+                        <a:srgbClr val="D9D9D9"/>
+                      </a:solidFill>
+                      <a:prstDash val="solid"/>
+                      <a:round/>
+                      <a:headEnd type="none" w="med" len="med"/>
+                      <a:tailEnd type="none" w="med" len="med"/>
+                    </a:lnB>
+                    <a:solidFill>
+                      <a:srgbClr val="EAF2F8"/>
+                    </a:solidFill>
+                  </a:tcPr>
+                </a:tc>
+                <a:tc>
+                  <a:txBody>
+                    <a:bodyPr/>
+                    <a:lstStyle/>
+                    <a:p>
+                      <a:pPr algn="l" indent="0" marL="0">
+                        <a:buNone/>
+                      </a:pPr>
+                      <a:r>
+                        <a:rPr lang="en-US" sz="800" u="sng" dirty="0">
+                          <a:solidFill>
+                            <a:srgbClr val="0563C1"/>
+                          </a:solidFill>
+                          <a:latin typeface="Calibri" pitchFamily="34" charset="0"/>
+                          <a:ea typeface="Calibri" pitchFamily="34" charset="-122"/>
+                          <a:cs typeface="Calibri" pitchFamily="34" charset="-120"/>
+                          <a:hlinkClick r:id="rId2" invalidUrl="" action="" tgtFrame="" tooltip="" history="1" highlightClick="0" endSnd="0">
+                            <a:extLst>
+                              <a:ext uri="{A12FA001-AC4F-418D-AE19-62706E023703}">
+                                <ahyp:hlinkClr xmlns:ahyp="http://schemas.microsoft.com/office/drawing/2018/hyperlinkcolor" val="tx"/>
+                              </a:ext>
+                            </a:extLst>
+                          </a:hlinkClick>
+                        </a:rPr>
+                        <a:t>https://www.democrata.es/en/international/von-der-leyen-expresses-the-eu-s-support-for-colombia-and-activates-copernicus-after-the-earthquake/</a:t>
+                      </a:r>
+                      <a:endParaRPr lang="en-US" sz="800" dirty="0">
+                        <a:latin typeface="Calibri" charset="0"/>
+                        <a:ea typeface="Calibri" charset="0"/>
+                        <a:cs typeface="Calibri" charset="0"/>
+                      </a:endParaRPr>
+                    </a:p>
+                  </a:txBody>
+                  <a:tcPr marL="50800" marR="50800" marT="50800" marB="50800" anchor="ctr">
+                    <a:lnL w="6350" cap="flat" cmpd="sng" algn="ctr">
+                      <a:solidFill>
+                        <a:srgbClr val="D9D9D9"/>
+                      </a:solidFill>
+                      <a:prstDash val="solid"/>
+                      <a:round/>
+                      <a:headEnd type="none" w="med" len="med"/>
+                      <a:tailEnd type="none" w="med" len="med"/>
+                    </a:lnL>
+                    <a:lnR w="6350" cap="flat" cmpd="sng" algn="ctr">
+                      <a:solidFill>
+                        <a:srgbClr val="D9D9D9"/>
+                      </a:solidFill>
+                      <a:prstDash val="solid"/>
+                      <a:round/>
+                      <a:headEnd type="none" w="med" len="med"/>
+                      <a:tailEnd type="none" w="med" len="med"/>
+                    </a:lnR>
+                    <a:lnT w="6350" cap="flat" cmpd="sng" algn="ctr">
+                      <a:solidFill>
+                        <a:srgbClr val="D9D9D9"/>
+                      </a:solidFill>
+                      <a:prstDash val="solid"/>
+                      <a:round/>
+                      <a:headEnd type="none" w="med" len="med"/>
+                      <a:tailEnd type="none" w="med" len="med"/>
+                    </a:lnT>
+                    <a:lnB w="6350" cap="flat" cmpd="sng" algn="ctr">
+                      <a:solidFill>
+                        <a:srgbClr val="D9D9D9"/>
+                      </a:solidFill>
+                      <a:prstDash val="solid"/>
+                      <a:round/>
+                      <a:headEnd type="none" w="med" len="med"/>
+                      <a:tailEnd type="none" w="med" len="med"/>
+                    </a:lnB>
+                    <a:solidFill>
+                      <a:srgbClr val="EAF2F8"/>
+                    </a:solidFill>
+                  </a:tcPr>
+                </a:tc>
+              </a:tr>
+            </a:tbl>
+          </a:graphicData>
+        </a:graphic>
+      </p:graphicFrame>
+      <p:sp>
+        <p:nvSpPr>
+          <p:cNvPr id="5" name="Shape 1"/>
+          <p:cNvSpPr/>
+          <p:nvPr/>
+        </p:nvSpPr>
+        <p:spPr>
+          <a:xfrm>
+            <a:off x="10268712" y="6510528"/>
+            <a:ext cx="1554480" cy="274320"/>
+          </a:xfrm>
+          <a:prstGeom prst="rect">
+            <a:avLst/>
+          </a:prstGeom>
+          <a:solidFill>
+            <a:srgbClr val="E8A317"/>
+          </a:solidFill>
+          <a:ln w="12700">
+            <a:solidFill>
+              <a:srgbClr val="E8A317"/>
+            </a:solidFill>
+            <a:prstDash val="solid"/>
+          </a:ln>
+        </p:spPr>
+      </p:sp>
+      <p:sp>
+        <p:nvSpPr>
+          <p:cNvPr id="6" name="Text 2"/>
+          <p:cNvSpPr/>
+          <p:nvPr/>
+        </p:nvSpPr>
+        <p:spPr>
+          <a:xfrm>
+            <a:off x="10268712" y="6510528"/>
+            <a:ext cx="1554480" cy="274320"/>
+          </a:xfrm>
+          <a:prstGeom prst="rect">
+            <a:avLst/>
+          </a:prstGeom>
+          <a:noFill/>
+          <a:ln/>
+        </p:spPr>
+        <p:txBody>
+          <a:bodyPr wrap="square" lIns="0" tIns="0" rIns="0" bIns="0" rtlCol="0" anchor="ctr"/>
+          <a:lstStyle/>
+          <a:p>
+            <a:pPr algn="ctr" indent="0" marL="0">
+              <a:buNone/>
+            </a:pPr>
+            <a:r>
+              <a:rPr lang="en-US" sz="950" b="1" dirty="0">
+                <a:solidFill>
+                  <a:srgbClr val="000000"/>
+                </a:solidFill>
+                <a:latin typeface="Calibri" pitchFamily="34" charset="0"/>
+                <a:ea typeface="Calibri" pitchFamily="34" charset="-122"/>
+                <a:cs typeface="Calibri" pitchFamily="34" charset="-120"/>
+              </a:rPr>
+              <a:t>ADRC  11/08/2026</a:t>
+            </a:r>
+            <a:endParaRPr lang="en-US" sz="950" dirty="0"/>
+          </a:p>
+        </p:txBody>
+      </p:sp>
+      <p:sp>
+        <p:nvSpPr>
+          <p:cNvPr id="7" name="Text 3"/>
+          <p:cNvSpPr/>
+          <p:nvPr/>
+        </p:nvSpPr>
+        <p:spPr>
+          <a:xfrm>
+            <a:off x="365760" y="6547104"/>
+            <a:ext cx="548640" cy="219456"/>
+          </a:xfrm>
+          <a:prstGeom prst="rect">
+            <a:avLst/>
+          </a:prstGeom>
+          <a:noFill/>
+          <a:ln/>
+        </p:spPr>
+        <p:txBody>
+          <a:bodyPr wrap="square" lIns="0" tIns="0" rIns="0" bIns="0" rtlCol="0" anchor="ctr"/>
+          <a:lstStyle/>
+          <a:p>
+            <a:pPr algn="l" indent="0" marL="0">
+              <a:buNone/>
+            </a:pPr>
+            <a:r>
+              <a:rPr lang="en-US" sz="900" dirty="0">
+                <a:solidFill>
+                  <a:srgbClr val="6A6A6A"/>
+                </a:solidFill>
+                <a:latin typeface="Calibri" pitchFamily="34" charset="0"/>
+                <a:ea typeface="Calibri" pitchFamily="34" charset="-122"/>
+                <a:cs typeface="Calibri" pitchFamily="34" charset="-120"/>
+              </a:rPr>
+              <a:t>22</a:t>
+            </a:r>
+            <a:endParaRPr lang="en-US" sz="900" dirty="0"/>
+          </a:p>
+        </p:txBody>
+      </p:sp>
+    </p:spTree>
+  </p:cSld>
+  <p:clrMapOvr>
+    <a:masterClrMapping/>
+  </p:clrMapOvr>
+</p:sld>
+</file>
+
+<file path=ppt/slides/slide23.xml><?xml version="1.0" encoding="utf-8"?>
+<p:sld xmlns:a="http://schemas.openxmlformats.org/drawingml/2006/main" xmlns:r="http://schemas.openxmlformats.org/officeDocument/2006/relationships" xmlns:p="http://schemas.openxmlformats.org/presentationml/2006/main">
+  <p:cSld name="Slide 23">
     <p:bg>
       <p:bgPr>
         <a:solidFill>
@@ -28718,7 +29457,7 @@
                 <a:ea typeface="Calibri" pitchFamily="34" charset="-122"/>
                 <a:cs typeface="Calibri" pitchFamily="34" charset="-120"/>
               </a:rPr>
-              <a:t>22</a:t>
+              <a:t>23</a:t>
             </a:r>
             <a:endParaRPr lang="en-US" sz="900" dirty="0"/>
           </a:p>

--- a/reports/colombia_eq_20260810/output/ADRC_EQ_COL_Choco_20260810_ES.pptx
+++ b/reports/colombia_eq_20260810/output/ADRC_EQ_COL_Choco_20260810_ES.pptx
@@ -12531,13 +12531,13 @@
             <a:r>
               <a:rPr lang="en-US" sz="1200" b="1" dirty="0">
                 <a:solidFill>
-                  <a:srgbClr val="B8860B"/>
+                  <a:srgbClr val="1E7A34"/>
                 </a:solidFill>
                 <a:latin typeface="Calibri" pitchFamily="34" charset="0"/>
                 <a:ea typeface="Calibri" pitchFamily="34" charset="-122"/>
                 <a:cs typeface="Calibri" pitchFamily="34" charset="-120"/>
               </a:rPr>
-              <a:t>[Prensa] </a:t>
+              <a:t>[Oficial] </a:t>
             </a:r>
             <a:pPr algn="l" indent="0" marL="0">
               <a:spcAft>
@@ -12554,7 +12554,42 @@
                 <a:ea typeface="Calibri" pitchFamily="34" charset="-122"/>
                 <a:cs typeface="Calibri" pitchFamily="34" charset="-120"/>
               </a:rPr>
-              <a:t>La Comisión Europea anunció la activación de Copernicus por el terremoto (declaración de la presidenta von der Leyen expresando el apoyo de la UE a Colombia). También se reporta la activación de la Carta Internacional «Espacio y Grandes Catástrofes». Al momento de redactar no se ha identificado ni el número de activación EMSR de Copernicus ni el de la Carta; nótese que EMSR915 corresponde a una activación por incendio forestal en Albania, no a este evento.</a:t>
+              <a:t>La cartografía rápida del Copernicus EMS se activó como EMSR916 «Earthquake in Colombia» a las 17:13 UTC del 10 de agosto (12:13 COT), a solicitud de los Servicios de la CE / DG ECHO, para proporcionar cartografía de emergencia de evaluación de daños por el sismo. En curso al momento de redactar, con 3 áreas de interés y 3 productos. La razón de la activación menciona a Quibdó, Pereira, Manizales y Cali como ciudades con daños significativos y edificios colapsados.</a:t>
+            </a:r>
+            <a:endParaRPr lang="en-US" sz="1200" dirty="0"/>
+          </a:p>
+          <a:p>
+            <a:pPr algn="l" marL="342900" indent="-342900">
+              <a:buSzPct val="100000"/>
+              <a:buChar char="•"/>
+            </a:pPr>
+            <a:r>
+              <a:rPr lang="en-US" sz="1200" b="1" dirty="0">
+                <a:solidFill>
+                  <a:srgbClr val="888888"/>
+                </a:solidFill>
+                <a:latin typeface="Calibri" pitchFamily="34" charset="0"/>
+                <a:ea typeface="Calibri" pitchFamily="34" charset="-122"/>
+                <a:cs typeface="Calibri" pitchFamily="34" charset="-120"/>
+              </a:rPr>
+              <a:t>[Por confirmar] </a:t>
+            </a:r>
+            <a:pPr algn="l" indent="0" marL="0">
+              <a:spcAft>
+                <a:spcPts val="500"/>
+              </a:spcAft>
+              <a:buNone/>
+            </a:pPr>
+            <a:r>
+              <a:rPr lang="en-US" sz="1300" dirty="0">
+                <a:solidFill>
+                  <a:srgbClr val="222222"/>
+                </a:solidFill>
+                <a:latin typeface="Calibri" pitchFamily="34" charset="0"/>
+                <a:ea typeface="Calibri" pitchFamily="34" charset="-122"/>
+                <a:cs typeface="Calibri" pitchFamily="34" charset="-120"/>
+              </a:rPr>
+              <a:t>También se reporta la activación de la Carta Internacional «Espacio y Grandes Catástrofes» para este sismo; el número de activación no estaba confirmado al momento de redactar.</a:t>
             </a:r>
             <a:endParaRPr lang="en-US" sz="1200" dirty="0"/>
           </a:p>
@@ -12800,7 +12835,7 @@
                   </a:extLst>
                 </a:hlinkClick>
               </a:rPr>
-              <a:t>Copernicus EMS: activaciones de cartografía rápida</a:t>
+              <a:t>Copernicus EMS — EMSR916 «Earthquake in Colombia» (activación)</a:t>
             </a:r>
             <a:pPr algn="l" indent="0" marL="0">
               <a:buNone/>
@@ -13703,7 +13738,7 @@
                           <a:ea typeface="Calibri" pitchFamily="34" charset="-122"/>
                           <a:cs typeface="Calibri" pitchFamily="34" charset="-120"/>
                         </a:rPr>
-                        <a:t>Activación de cartografía rápida anunciada por la Comisión Europea; número de activación EMSR aún no identificado</a:t>
+                        <a:t>EMSR916 «Earthquake in Colombia» — cartografía rápida para evaluación de daños; solicitada por los Servicios de la CE / DG ECHO; 3 AOI, 3 productos</a:t>
                       </a:r>
                       <a:endParaRPr lang="en-US" sz="950" dirty="0">
                         <a:latin typeface="Calibri" charset="0"/>
@@ -13771,7 +13806,7 @@
                           <a:ea typeface="Calibri" pitchFamily="34" charset="-122"/>
                           <a:cs typeface="Calibri" pitchFamily="34" charset="-120"/>
                         </a:rPr>
-                        <a:t>Anunciada / número pendiente</a:t>
+                        <a:t>En curso (EMSR916)</a:t>
                       </a:r>
                       <a:endParaRPr lang="en-US" sz="900" dirty="0">
                         <a:latin typeface="Calibri" charset="0"/>
@@ -13833,13 +13868,13 @@
                       <a:r>
                         <a:rPr lang="en-US" sz="850" b="1" dirty="0">
                           <a:solidFill>
-                            <a:srgbClr val="B8860B"/>
+                            <a:srgbClr val="1E7A34"/>
                           </a:solidFill>
                           <a:latin typeface="Calibri" pitchFamily="34" charset="0"/>
                           <a:ea typeface="Calibri" pitchFamily="34" charset="-122"/>
                           <a:cs typeface="Calibri" pitchFamily="34" charset="-120"/>
                         </a:rPr>
-                        <a:t>Prensa</a:t>
+                        <a:t>Oficial</a:t>
                       </a:r>
                       <a:endParaRPr lang="en-US" sz="850" dirty="0">
                         <a:latin typeface="Calibri" charset="0"/>
@@ -15161,7 +15196,7 @@
                   </a:extLst>
                 </a:hlinkClick>
               </a:rPr>
-              <a:t>Copernicus EMS: activaciones de cartografía rápida</a:t>
+              <a:t>Copernicus EMS — EMSR916 «Earthquake in Colombia» (activación)</a:t>
             </a:r>
             <a:pPr algn="l" indent="0" marL="0">
               <a:buNone/>
@@ -23064,7 +23099,7 @@
                           <a:ea typeface="Calibri" pitchFamily="34" charset="-122"/>
                           <a:cs typeface="Calibri" pitchFamily="34" charset="-120"/>
                         </a:rPr>
-                        <a:t>Copernicus EMS: activaciones de cartografía rápida</a:t>
+                        <a:t>Copernicus EMS — EMSR916 «Earthquake in Colombia» (activación)</a:t>
                       </a:r>
                       <a:endParaRPr lang="en-US" sz="950" dirty="0">
                         <a:latin typeface="Calibri" charset="0"/>
@@ -23207,7 +23242,7 @@
                             </a:extLst>
                           </a:hlinkClick>
                         </a:rPr>
-                        <a:t>https://emergency.copernicus.eu/mapping/list-of-activations-rapid</a:t>
+                        <a:t>https://mapping.emergency.copernicus.eu/activations/EMSR916/</a:t>
                       </a:r>
                       <a:endParaRPr lang="en-US" sz="800" dirty="0">
                         <a:latin typeface="Calibri" charset="0"/>
@@ -33261,7 +33296,7 @@
                           <a:ea typeface="Calibri" pitchFamily="34" charset="-122"/>
                           <a:cs typeface="Calibri" pitchFamily="34" charset="-120"/>
                         </a:rPr>
-                        <a:t>Tarde</a:t>
+                        <a:t>12:13</a:t>
                       </a:r>
                       <a:endParaRPr lang="en-US" sz="1000" dirty="0">
                         <a:latin typeface="Calibri" charset="0"/>
@@ -33329,7 +33364,7 @@
                           <a:ea typeface="Calibri" pitchFamily="34" charset="-122"/>
                           <a:cs typeface="Calibri" pitchFamily="34" charset="-120"/>
                         </a:rPr>
-                        <a:t>Primer reporte nacional de daños: 111 muertos y 87 heridos; 1.575 viviendas averiadas, 37 destruidas y 61 edificios colapsados; 18 centros de salud, 52 establecimientos educativos, 17 equipamientos comunitarios, 18 vías principales y 6 aeropuertos regionales con daños.</a:t>
+                        <a:t>Se activa la cartografía rápida del Copernicus EMS como EMSR916 (17:13 UTC), a solicitud de los Servicios de la CE / DG ECHO, para cartografía de evaluación de daños por el sismo.</a:t>
                       </a:r>
                       <a:endParaRPr lang="en-US" sz="1000" dirty="0">
                         <a:latin typeface="Calibri" charset="0"/>
@@ -33397,7 +33432,7 @@
                           <a:ea typeface="Calibri" pitchFamily="34" charset="-122"/>
                           <a:cs typeface="Calibri" pitchFamily="34" charset="-120"/>
                         </a:rPr>
-                        <a:t>Presidencia / UNGRD</a:t>
+                        <a:t>Copernicus EMS</a:t>
                       </a:r>
                       <a:endParaRPr lang="en-US" sz="850" dirty="0">
                         <a:latin typeface="Calibri" charset="0"/>
@@ -33535,7 +33570,7 @@
                           <a:ea typeface="Calibri" pitchFamily="34" charset="-122"/>
                           <a:cs typeface="Calibri" pitchFamily="34" charset="-120"/>
                         </a:rPr>
-                        <a:t>Ecuador moviliza un grupo USAR de 47 personas con unidades caninas; México y otros gobiernos ofrecen ayuda, que se canalizará a través de la Cancillería y la UNGRD.</a:t>
+                        <a:t>Primer reporte nacional de daños: 111 muertos y 87 heridos; 1.575 viviendas averiadas, 37 destruidas y 61 edificios colapsados; 18 centros de salud, 52 establecimientos educativos, 17 equipamientos comunitarios, 18 vías principales y 6 aeropuertos regionales con daños.</a:t>
                       </a:r>
                       <a:endParaRPr lang="en-US" sz="1000" dirty="0">
                         <a:latin typeface="Calibri" charset="0"/>
@@ -33597,13 +33632,13 @@
                       <a:r>
                         <a:rPr lang="en-US" sz="850" b="1" dirty="0">
                           <a:solidFill>
-                            <a:srgbClr val="B8860B"/>
+                            <a:srgbClr val="1E7A34"/>
                           </a:solidFill>
                           <a:latin typeface="Calibri" pitchFamily="34" charset="0"/>
                           <a:ea typeface="Calibri" pitchFamily="34" charset="-122"/>
                           <a:cs typeface="Calibri" pitchFamily="34" charset="-120"/>
                         </a:rPr>
-                        <a:t>Prensa internacional</a:t>
+                        <a:t>Presidencia / UNGRD</a:t>
                       </a:r>
                       <a:endParaRPr lang="en-US" sz="850" dirty="0">
                         <a:latin typeface="Calibri" charset="0"/>
@@ -33673,7 +33708,7 @@
                           <a:ea typeface="Calibri" pitchFamily="34" charset="-122"/>
                           <a:cs typeface="Calibri" pitchFamily="34" charset="-120"/>
                         </a:rPr>
-                        <a:t>Mismo día</a:t>
+                        <a:t>Tarde</a:t>
                       </a:r>
                       <a:endParaRPr lang="en-US" sz="1000" dirty="0">
                         <a:latin typeface="Calibri" charset="0"/>
@@ -33741,7 +33776,7 @@
                           <a:ea typeface="Calibri" pitchFamily="34" charset="-122"/>
                           <a:cs typeface="Calibri" pitchFamily="34" charset="-120"/>
                         </a:rPr>
-                        <a:t>Se reporta la activación de la Carta Internacional «Espacio y Grandes Catástrofes» y la movilización del Servicio de Gestión de Emergencias Copernicus; los detalles están en verificación.</a:t>
+                        <a:t>Ecuador moviliza un grupo USAR de 47 personas con unidades caninas; México y otros gobiernos ofrecen ayuda, que se canalizará a través de la Cancillería y la UNGRD.</a:t>
                       </a:r>
                       <a:endParaRPr lang="en-US" sz="1000" dirty="0">
                         <a:latin typeface="Calibri" charset="0"/>
@@ -33803,13 +33838,13 @@
                       <a:r>
                         <a:rPr lang="en-US" sz="850" b="1" dirty="0">
                           <a:solidFill>
-                            <a:srgbClr val="888888"/>
+                            <a:srgbClr val="B8860B"/>
                           </a:solidFill>
                           <a:latin typeface="Calibri" pitchFamily="34" charset="0"/>
                           <a:ea typeface="Calibri" pitchFamily="34" charset="-122"/>
                           <a:cs typeface="Calibri" pitchFamily="34" charset="-120"/>
                         </a:rPr>
-                        <a:t>Carta / Copernicus</a:t>
+                        <a:t>Prensa internacional</a:t>
                       </a:r>
                       <a:endParaRPr lang="en-US" sz="850" dirty="0">
                         <a:latin typeface="Calibri" charset="0"/>
